--- a/pitch/Datadash-Smart-Money.pptx
+++ b/pitch/Datadash-Smart-Money.pptx
@@ -1041,7 +1041,7 @@
           <a:p>
             <a:r>
               <a:rPr lang="en-US" dirty="0"/>
-              <a:t>A real signal from pnpm preview on 2026-09-23. The last line shows what the subscriber's agent does next when copy-trading is on; in the demo we run it live.</a:t>
+              <a:t>A real signal from pnpm preview on 2026-09-23. The last line describes what the subscriber's agent does next when copy-trading is on; no order had been placed when this deck was made. In the demo we run it live.</a:t>
             </a:r>
             <a:endParaRPr lang="en-US" dirty="0"/>
           </a:p>
@@ -3087,7 +3087,7 @@
         <p:spPr>
           <a:xfrm>
             <a:off x="1371600" y="640080"/>
-            <a:ext cx="3657600" cy="502920"/>
+            <a:ext cx="5486400" cy="502920"/>
           </a:xfrm>
           <a:prstGeom prst="rect">
             <a:avLst/>
@@ -3111,7 +3111,7 @@
                 <a:ea typeface="Arial" pitchFamily="34" charset="-122"/>
                 <a:cs typeface="Arial" pitchFamily="34" charset="-120"/>
               </a:rPr>
-              <a:t>Datadash</a:t>
+              <a:t>Datadash Polymarket Analytics</a:t>
             </a:r>
             <a:endParaRPr lang="en-US" sz="2200" dirty="0"/>
           </a:p>
@@ -6841,7 +6841,7 @@
         <p:spPr>
           <a:xfrm>
             <a:off x="1371600" y="640080"/>
-            <a:ext cx="3657600" cy="502920"/>
+            <a:ext cx="5486400" cy="502920"/>
           </a:xfrm>
           <a:prstGeom prst="rect">
             <a:avLst/>
@@ -6865,7 +6865,7 @@
                 <a:ea typeface="Arial" pitchFamily="34" charset="-122"/>
                 <a:cs typeface="Arial" pitchFamily="34" charset="-120"/>
               </a:rPr>
-              <a:t>Datadash</a:t>
+              <a:t>Datadash Polymarket Analytics</a:t>
             </a:r>
             <a:endParaRPr lang="en-US" sz="2200" dirty="0"/>
           </a:p>
@@ -8953,7 +8953,7 @@
                 <a:ea typeface="Courier New" pitchFamily="34" charset="-122"/>
                 <a:cs typeface="Courier New" pitchFamily="34" charset="-120"/>
               </a:rPr>
-              <a:t>limit order: NO at 0.73, $5, via the Polymarket plugin</a:t>
+              <a:t>if copy-trading: limit order NO at 0.73 or less, your amount</a:t>
             </a:r>
             <a:endParaRPr lang="en-US" sz="1500" dirty="0"/>
           </a:p>

--- a/pitch/Datadash-Smart-Money.pptx
+++ b/pitch/Datadash-Smart-Money.pptx
@@ -7909,7 +7909,7 @@
                 <a:ea typeface="Arial" pitchFamily="34" charset="-122"/>
                 <a:cs typeface="Arial" pitchFamily="34" charset="-120"/>
               </a:rPr>
-              <a:t>A top-500 trader holds 3x+ their usual size, with a high Datadash score. Gives the moment, the price and the size.</a:t>
+              <a:t>One of Datadash's 1,000 top-scoring positions, from any wallet, 3x+ its usual size. Gives the moment, the price and the size.</a:t>
             </a:r>
             <a:endParaRPr lang="en-US" sz="1500" dirty="0"/>
           </a:p>
@@ -8104,7 +8104,7 @@
                 <a:ea typeface="Arial" pitchFamily="34" charset="-122"/>
                 <a:cs typeface="Arial" pitchFamily="34" charset="-120"/>
               </a:rPr>
-              <a:t>60%+ of the money top-500 wallets hold on that market sits on the same side, across 3+ wallets.</a:t>
+              <a:t>The 500 most profitable traders put 60%+ of their money on the same side: $10K+, 3+ wallets.</a:t>
             </a:r>
             <a:endParaRPr lang="en-US" sz="1500" dirty="0"/>
           </a:p>
@@ -10758,7 +10758,7 @@
                 <a:ea typeface="Arial" pitchFamily="34" charset="-122"/>
                 <a:cs typeface="Arial" pitchFamily="34" charset="-120"/>
               </a:rPr>
-              <a:t>Top 500</a:t>
+              <a:t>Top 1,000</a:t>
             </a:r>
             <a:endParaRPr lang="en-US" sz="2400" dirty="0"/>
           </a:p>
@@ -10797,7 +10797,7 @@
                 <a:ea typeface="Arial" pitchFamily="34" charset="-122"/>
                 <a:cs typeface="Arial" pitchFamily="34" charset="-120"/>
               </a:rPr>
-              <a:t>trader by all-time PnL</a:t>
+              <a:t>positions by Datadash score, any wallet</a:t>
             </a:r>
             <a:endParaRPr lang="en-US" sz="1300" dirty="0"/>
           </a:p>
@@ -11427,7 +11427,7 @@
                 <a:ea typeface="Arial" pitchFamily="34" charset="-122"/>
                 <a:cs typeface="Arial" pitchFamily="34" charset="-120"/>
               </a:rPr>
-              <a:t>since a top trader last bought</a:t>
+              <a:t>since the trader last bought</a:t>
             </a:r>
             <a:endParaRPr lang="en-US" sz="1300" dirty="0"/>
           </a:p>
@@ -11637,7 +11637,7 @@
                 <a:ea typeface="Arial" pitchFamily="34" charset="-122"/>
                 <a:cs typeface="Arial" pitchFamily="34" charset="-120"/>
               </a:rPr>
-              <a:t>of top-500 money on the same side, 3+ wallets</a:t>
+              <a:t>of top-500 money on the same side, $10K+</a:t>
             </a:r>
             <a:endParaRPr lang="en-US" sz="1300" dirty="0"/>
           </a:p>
@@ -13804,7 +13804,7 @@
                 <a:ea typeface="Arial" pitchFamily="34" charset="-122"/>
                 <a:cs typeface="Arial" pitchFamily="34" charset="-120"/>
               </a:rPr>
-              <a:t>A top trader must have bought within 7 days</a:t>
+              <a:t>The trader must have bought within 7 days</a:t>
             </a:r>
             <a:endParaRPr lang="en-US" sz="1700" dirty="0"/>
           </a:p>

--- a/pitch/Datadash-Smart-Money.pptx
+++ b/pitch/Datadash-Smart-Money.pptx
@@ -14330,7 +14330,7 @@
                 <a:ea typeface="Arial" pitchFamily="34" charset="-122"/>
                 <a:cs typeface="Arial" pitchFamily="34" charset="-120"/>
               </a:rPr>
-              <a:t>Free Datadash tools any agent can call</a:t>
+              <a:t>Datadash's MCP tools, any agent can call</a:t>
             </a:r>
             <a:endParaRPr lang="en-US" sz="1500" dirty="0"/>
           </a:p>
@@ -14351,7 +14351,7 @@
                 <a:ea typeface="Arial" pitchFamily="34" charset="-122"/>
                 <a:cs typeface="Arial" pitchFamily="34" charset="-120"/>
               </a:rPr>
-              <a:t>smart-money-edge, market-read</a:t>
+              <a:t>Smart money, scores, wallets</a:t>
             </a:r>
             <a:endParaRPr lang="en-US" sz="1500" dirty="0"/>
           </a:p>

--- a/pitch/Datadash-Smart-Money.pptx
+++ b/pitch/Datadash-Smart-Money.pptx
@@ -689,7 +689,7 @@
           <a:p>
             <a:r>
               <a:rPr lang="en-US" dirty="0"/>
-              <a:t>The backtest showed most historical signals were sports bets settling within hours; a category filter is the first product change to test.</a:t>
+              <a:t>Next is tuning on the live track record: the backtest can't replay the Datadash score or the smart-money check, so real results decide the thresholds.</a:t>
             </a:r>
             <a:endParaRPr lang="en-US" dirty="0"/>
           </a:p>
@@ -1305,7 +1305,7 @@
           <a:p>
             <a:r>
               <a:rPr lang="en-US" dirty="0"/>
-              <a:t>pnpm backtest. As delivered with caps: 3,782 resolved, 64.9% hit rate, +4.4% ± 1.4% per signal, max drawdown $2,327. Before caps: 6,264 resolved, +2.1% ± 1.1%. Entries at 0.10 to 0.30 lost 20.8%.</a:t>
+              <a:t>pnpm backtest, run 2026-09-23 over 180 days, YES/NO markets only. As delivered with caps: 615 resolved, 66.5% hit rate at average entry 0.65, +2.5% ± 3.6% per signal, +$1,548 at $100 each, max drawdown $2,514. Before caps: 681 resolved, +1.5% ± 3.4%. An earlier run that included team-name sports markets looked stronger (+4.4% over 3,782 signals), but OKX's YES/NO format can't carry those. The live filters that matter most, the Datadash score and the smart-money consensus, can't be replayed.</a:t>
             </a:r>
             <a:endParaRPr lang="en-US" dirty="0"/>
           </a:p>
@@ -4942,7 +4942,7 @@
                 <a:ea typeface="Arial" pitchFamily="34" charset="-122"/>
                 <a:cs typeface="Arial" pitchFamily="34" charset="-120"/>
               </a:rPr>
-              <a:t>Category filters, starting with in-play sports</a:t>
+              <a:t>Category filters for subscribers</a:t>
             </a:r>
             <a:endParaRPr lang="en-US" sz="1600" dirty="0"/>
           </a:p>
@@ -12045,7 +12045,7 @@
                 <a:ea typeface="Arial" pitchFamily="34" charset="-122"/>
                 <a:cs typeface="Arial" pitchFamily="34" charset="-120"/>
               </a:rPr>
-              <a:t>180 days replayed: a thin edge, mostly sports.</a:t>
+              <a:t>180 days replayed: roughly break-even.</a:t>
             </a:r>
             <a:endParaRPr lang="en-US" sz="3600" dirty="0"/>
           </a:p>
@@ -12059,8 +12059,8 @@
         </p:nvSpPr>
         <p:spPr>
           <a:xfrm>
-            <a:off x="731520" y="2103120"/>
-            <a:ext cx="5486400" cy="1280160"/>
+            <a:off x="731520" y="2240280"/>
+            <a:ext cx="5486400" cy="1097280"/>
           </a:xfrm>
           <a:prstGeom prst="rect">
             <a:avLst/>
@@ -12076,17 +12076,17 @@
               <a:buNone/>
             </a:pPr>
             <a:r>
-              <a:rPr lang="en-US" sz="8800" b="1" dirty="0">
-                <a:solidFill>
-                  <a:srgbClr val="2EE6A6"/>
-                </a:solidFill>
-                <a:latin typeface="Arial" pitchFamily="34" charset="0"/>
-                <a:ea typeface="Arial" pitchFamily="34" charset="-122"/>
-                <a:cs typeface="Arial" pitchFamily="34" charset="-120"/>
-              </a:rPr>
-              <a:t>+$16.7K</a:t>
-            </a:r>
-            <a:endParaRPr lang="en-US" sz="8800" dirty="0"/>
+              <a:rPr lang="en-US" sz="6400" b="1" dirty="0">
+                <a:solidFill>
+                  <a:srgbClr val="FFFFFF"/>
+                </a:solidFill>
+                <a:latin typeface="Arial" pitchFamily="34" charset="0"/>
+                <a:ea typeface="Arial" pitchFamily="34" charset="-122"/>
+                <a:cs typeface="Arial" pitchFamily="34" charset="-120"/>
+              </a:rPr>
+              <a:t>Break-even</a:t>
+            </a:r>
+            <a:endParaRPr lang="en-US" sz="6400" dirty="0"/>
           </a:p>
         </p:txBody>
       </p:sp>
@@ -12098,8 +12098,8 @@
         </p:nvSpPr>
         <p:spPr>
           <a:xfrm>
-            <a:off x="731520" y="3429000"/>
-            <a:ext cx="5394960" cy="640080"/>
+            <a:off x="731520" y="3383280"/>
+            <a:ext cx="5394960" cy="731520"/>
           </a:xfrm>
           <a:prstGeom prst="rect">
             <a:avLst/>
@@ -12115,7 +12115,7 @@
               <a:buNone/>
             </a:pPr>
             <a:r>
-              <a:rPr lang="en-US" sz="1700" dirty="0">
+              <a:rPr lang="en-US" sz="1600" dirty="0">
                 <a:solidFill>
                   <a:srgbClr val="C9C4EE"/>
                 </a:solidFill>
@@ -12123,9 +12123,9 @@
                 <a:ea typeface="Arial" pitchFamily="34" charset="-122"/>
                 <a:cs typeface="Arial" pitchFamily="34" charset="-120"/>
               </a:rPr>
-              <a:t>backtest, not a promise: 3,782 settled signals at $100 each, March to September 2026</a:t>
-            </a:r>
-            <a:endParaRPr lang="en-US" sz="1700" dirty="0"/>
+              <a:t>+2.5% ± 3.6% per signal over 615 settled signals at $100 each, March to September 2026. Backtest, not a promise.</a:t>
+            </a:r>
+            <a:endParaRPr lang="en-US" sz="1600" dirty="0"/>
           </a:p>
         </p:txBody>
       </p:sp>
@@ -12162,7 +12162,7 @@
                 <a:ea typeface="Arial" pitchFamily="34" charset="-122"/>
                 <a:cs typeface="Arial" pitchFamily="34" charset="-120"/>
               </a:rPr>
-              <a:t>64.9%</a:t>
+              <a:t>66.5%</a:t>
             </a:r>
             <a:endParaRPr lang="en-US" sz="3000" dirty="0"/>
           </a:p>
@@ -12240,7 +12240,7 @@
                 <a:ea typeface="Arial" pitchFamily="34" charset="-122"/>
                 <a:cs typeface="Arial" pitchFamily="34" charset="-120"/>
               </a:rPr>
-              <a:t>+4.4%</a:t>
+              <a:t>0.65</a:t>
             </a:r>
             <a:endParaRPr lang="en-US" sz="3000" dirty="0"/>
           </a:p>
@@ -12279,7 +12279,7 @@
                 <a:ea typeface="Arial" pitchFamily="34" charset="-122"/>
                 <a:cs typeface="Arial" pitchFamily="34" charset="-120"/>
               </a:rPr>
-              <a:t>per signal</a:t>
+              <a:t>average entry</a:t>
             </a:r>
             <a:endParaRPr lang="en-US" sz="1400" dirty="0"/>
           </a:p>
@@ -12318,7 +12318,7 @@
                 <a:ea typeface="Arial" pitchFamily="34" charset="-122"/>
                 <a:cs typeface="Arial" pitchFamily="34" charset="-120"/>
               </a:rPr>
-              <a:t>$2.3K</a:t>
+              <a:t>$2.5K</a:t>
             </a:r>
             <a:endParaRPr lang="en-US" sz="3000" dirty="0"/>
           </a:p>
@@ -12423,7 +12423,7 @@
                 <a:ea typeface="Arial" pitchFamily="34" charset="-122"/>
                 <a:cs typeface="Arial" pitchFamily="34" charset="-120"/>
               </a:rPr>
-              <a:t>Average return by time to settle</a:t>
+              <a:t>Average return by entry price</a:t>
             </a:r>
             <a:endParaRPr lang="en-US" sz="1400" dirty="0"/>
           </a:p>
@@ -12437,7 +12437,7 @@
         </p:nvSpPr>
         <p:spPr>
           <a:xfrm>
-            <a:off x="6720840" y="4663440"/>
+            <a:off x="6720840" y="3703320"/>
             <a:ext cx="4754880" cy="0"/>
           </a:xfrm>
           <a:prstGeom prst="line">
@@ -12460,18 +12460,18 @@
         </p:nvSpPr>
         <p:spPr>
           <a:xfrm>
-            <a:off x="6903720" y="2935224"/>
-            <a:ext cx="548640" cy="1728216"/>
-          </a:xfrm>
-          <a:prstGeom prst="rect">
-            <a:avLst/>
-          </a:prstGeom>
-          <a:solidFill>
-            <a:srgbClr val="2EE6A6"/>
-          </a:solidFill>
-          <a:ln w="12700">
-            <a:solidFill>
-              <a:srgbClr val="2EE6A6"/>
+            <a:off x="7040880" y="3703320"/>
+            <a:ext cx="640080" cy="914400"/>
+          </a:xfrm>
+          <a:prstGeom prst="rect">
+            <a:avLst/>
+          </a:prstGeom>
+          <a:solidFill>
+            <a:srgbClr val="FF6B7A"/>
+          </a:solidFill>
+          <a:ln w="12700">
+            <a:solidFill>
+              <a:srgbClr val="FF6B7A"/>
             </a:solidFill>
             <a:prstDash val="solid"/>
           </a:ln>
@@ -12485,8 +12485,8 @@
         </p:nvSpPr>
         <p:spPr>
           <a:xfrm>
-            <a:off x="6720840" y="2615184"/>
-            <a:ext cx="914400" cy="274320"/>
+            <a:off x="6812280" y="4663440"/>
+            <a:ext cx="1097280" cy="274320"/>
           </a:xfrm>
           <a:prstGeom prst="rect">
             <a:avLst/>
@@ -12504,13 +12504,133 @@
             <a:r>
               <a:rPr lang="en-US" sz="1300" b="1" dirty="0">
                 <a:solidFill>
+                  <a:srgbClr val="FF6B7A"/>
+                </a:solidFill>
+                <a:latin typeface="Arial" pitchFamily="34" charset="0"/>
+                <a:ea typeface="Arial" pitchFamily="34" charset="-122"/>
+                <a:cs typeface="Arial" pitchFamily="34" charset="-120"/>
+              </a:rPr>
+              <a:t>-10.0%</a:t>
+            </a:r>
+            <a:endParaRPr lang="en-US" sz="1300" dirty="0"/>
+          </a:p>
+        </p:txBody>
+      </p:sp>
+      <p:sp>
+        <p:nvSpPr>
+          <p:cNvPr id="21" name="Text 19"/>
+          <p:cNvSpPr txBox="1"/>
+          <p:nvPr/>
+        </p:nvSpPr>
+        <p:spPr>
+          <a:xfrm>
+            <a:off x="6766560" y="5074920"/>
+            <a:ext cx="1188720" cy="457200"/>
+          </a:xfrm>
+          <a:prstGeom prst="rect">
+            <a:avLst/>
+          </a:prstGeom>
+          <a:noFill/>
+          <a:ln/>
+        </p:spPr>
+        <p:txBody>
+          <a:bodyPr wrap="square" lIns="0" tIns="0" rIns="0" bIns="0" rtlCol="0" anchor="ctr"/>
+          <a:lstStyle/>
+          <a:p>
+            <a:pPr algn="ctr" indent="0" marL="0">
+              <a:buNone/>
+            </a:pPr>
+            <a:r>
+              <a:rPr lang="en-US" sz="1200" dirty="0">
+                <a:solidFill>
+                  <a:srgbClr val="C9C4EE"/>
+                </a:solidFill>
+                <a:latin typeface="Arial" pitchFamily="34" charset="0"/>
+                <a:ea typeface="Arial" pitchFamily="34" charset="-122"/>
+                <a:cs typeface="Arial" pitchFamily="34" charset="-120"/>
+              </a:rPr>
+              <a:t>10–30¢</a:t>
+            </a:r>
+            <a:endParaRPr lang="en-US" sz="1200" dirty="0"/>
+          </a:p>
+          <a:p>
+            <a:pPr algn="ctr" indent="0" marL="0">
+              <a:buNone/>
+            </a:pPr>
+            <a:r>
+              <a:rPr lang="en-US" sz="1200" dirty="0">
+                <a:solidFill>
+                  <a:srgbClr val="C9C4EE"/>
+                </a:solidFill>
+                <a:latin typeface="Arial" pitchFamily="34" charset="0"/>
+                <a:ea typeface="Arial" pitchFamily="34" charset="-122"/>
+                <a:cs typeface="Arial" pitchFamily="34" charset="-120"/>
+              </a:rPr>
+              <a:t>44 signals</a:t>
+            </a:r>
+            <a:endParaRPr lang="en-US" sz="1200" dirty="0"/>
+          </a:p>
+        </p:txBody>
+      </p:sp>
+      <p:sp>
+        <p:nvSpPr>
+          <p:cNvPr id="22" name="Shape 20"/>
+          <p:cNvSpPr/>
+          <p:nvPr/>
+        </p:nvSpPr>
+        <p:spPr>
+          <a:xfrm>
+            <a:off x="8183880" y="3438144"/>
+            <a:ext cx="640080" cy="265176"/>
+          </a:xfrm>
+          <a:prstGeom prst="rect">
+            <a:avLst/>
+          </a:prstGeom>
+          <a:solidFill>
+            <a:srgbClr val="7653F6"/>
+          </a:solidFill>
+          <a:ln w="12700">
+            <a:solidFill>
+              <a:srgbClr val="7653F6"/>
+            </a:solidFill>
+            <a:prstDash val="solid"/>
+          </a:ln>
+        </p:spPr>
+      </p:sp>
+      <p:sp>
+        <p:nvSpPr>
+          <p:cNvPr id="23" name="Text 21"/>
+          <p:cNvSpPr txBox="1"/>
+          <p:nvPr/>
+        </p:nvSpPr>
+        <p:spPr>
+          <a:xfrm>
+            <a:off x="7955280" y="3118104"/>
+            <a:ext cx="1097280" cy="274320"/>
+          </a:xfrm>
+          <a:prstGeom prst="rect">
+            <a:avLst/>
+          </a:prstGeom>
+          <a:noFill/>
+          <a:ln/>
+        </p:spPr>
+        <p:txBody>
+          <a:bodyPr wrap="square" lIns="0" tIns="0" rIns="0" bIns="0" rtlCol="0" anchor="ctr"/>
+          <a:lstStyle/>
+          <a:p>
+            <a:pPr algn="ctr" indent="0" marL="0">
+              <a:buNone/>
+            </a:pPr>
+            <a:r>
+              <a:rPr lang="en-US" sz="1300" b="1" dirty="0">
+                <a:solidFill>
                   <a:srgbClr val="FFFFFF"/>
                 </a:solidFill>
                 <a:latin typeface="Arial" pitchFamily="34" charset="0"/>
                 <a:ea typeface="Arial" pitchFamily="34" charset="-122"/>
                 <a:cs typeface="Arial" pitchFamily="34" charset="-120"/>
               </a:rPr>
-              <a:t>+6.3%</a:t>
+              <a:t>+2.9%</a:t>
             </a:r>
             <a:endParaRPr lang="en-US" sz="1300" dirty="0"/>
           </a:p>
@@ -12518,14 +12638,14 @@
       </p:sp>
       <p:sp>
         <p:nvSpPr>
-          <p:cNvPr id="21" name="Text 19"/>
-          <p:cNvSpPr txBox="1"/>
-          <p:nvPr/>
-        </p:nvSpPr>
-        <p:spPr>
-          <a:xfrm>
-            <a:off x="6720840" y="5120640"/>
-            <a:ext cx="914400" cy="274320"/>
+          <p:cNvPr id="24" name="Text 22"/>
+          <p:cNvSpPr txBox="1"/>
+          <p:nvPr/>
+        </p:nvSpPr>
+        <p:spPr>
+          <a:xfrm>
+            <a:off x="7909560" y="5074920"/>
+            <a:ext cx="1188720" cy="457200"/>
           </a:xfrm>
           <a:prstGeom prst="rect">
             <a:avLst/>
@@ -12541,7 +12661,7 @@
               <a:buNone/>
             </a:pPr>
             <a:r>
-              <a:rPr lang="en-US" sz="1300" dirty="0">
+              <a:rPr lang="en-US" sz="1200" dirty="0">
                 <a:solidFill>
                   <a:srgbClr val="C9C4EE"/>
                 </a:solidFill>
@@ -12549,7 +12669,88 @@
                 <a:ea typeface="Arial" pitchFamily="34" charset="-122"/>
                 <a:cs typeface="Arial" pitchFamily="34" charset="-120"/>
               </a:rPr>
-              <a:t>&lt;2h</a:t>
+              <a:t>30–50¢</a:t>
+            </a:r>
+            <a:endParaRPr lang="en-US" sz="1200" dirty="0"/>
+          </a:p>
+          <a:p>
+            <a:pPr algn="ctr" indent="0" marL="0">
+              <a:buNone/>
+            </a:pPr>
+            <a:r>
+              <a:rPr lang="en-US" sz="1200" dirty="0">
+                <a:solidFill>
+                  <a:srgbClr val="C9C4EE"/>
+                </a:solidFill>
+                <a:latin typeface="Arial" pitchFamily="34" charset="0"/>
+                <a:ea typeface="Arial" pitchFamily="34" charset="-122"/>
+                <a:cs typeface="Arial" pitchFamily="34" charset="-120"/>
+              </a:rPr>
+              <a:t>99 signals</a:t>
+            </a:r>
+            <a:endParaRPr lang="en-US" sz="1200" dirty="0"/>
+          </a:p>
+        </p:txBody>
+      </p:sp>
+      <p:sp>
+        <p:nvSpPr>
+          <p:cNvPr id="25" name="Shape 23"/>
+          <p:cNvSpPr/>
+          <p:nvPr/>
+        </p:nvSpPr>
+        <p:spPr>
+          <a:xfrm>
+            <a:off x="9326880" y="3703320"/>
+            <a:ext cx="640080" cy="118872"/>
+          </a:xfrm>
+          <a:prstGeom prst="rect">
+            <a:avLst/>
+          </a:prstGeom>
+          <a:solidFill>
+            <a:srgbClr val="FF6B7A"/>
+          </a:solidFill>
+          <a:ln w="12700">
+            <a:solidFill>
+              <a:srgbClr val="FF6B7A"/>
+            </a:solidFill>
+            <a:prstDash val="solid"/>
+          </a:ln>
+        </p:spPr>
+      </p:sp>
+      <p:sp>
+        <p:nvSpPr>
+          <p:cNvPr id="26" name="Text 24"/>
+          <p:cNvSpPr txBox="1"/>
+          <p:nvPr/>
+        </p:nvSpPr>
+        <p:spPr>
+          <a:xfrm>
+            <a:off x="9098280" y="3867912"/>
+            <a:ext cx="1097280" cy="274320"/>
+          </a:xfrm>
+          <a:prstGeom prst="rect">
+            <a:avLst/>
+          </a:prstGeom>
+          <a:noFill/>
+          <a:ln/>
+        </p:spPr>
+        <p:txBody>
+          <a:bodyPr wrap="square" lIns="0" tIns="0" rIns="0" bIns="0" rtlCol="0" anchor="ctr"/>
+          <a:lstStyle/>
+          <a:p>
+            <a:pPr algn="ctr" indent="0" marL="0">
+              <a:buNone/>
+            </a:pPr>
+            <a:r>
+              <a:rPr lang="en-US" sz="1300" b="1" dirty="0">
+                <a:solidFill>
+                  <a:srgbClr val="FF6B7A"/>
+                </a:solidFill>
+                <a:latin typeface="Arial" pitchFamily="34" charset="0"/>
+                <a:ea typeface="Arial" pitchFamily="34" charset="-122"/>
+                <a:cs typeface="Arial" pitchFamily="34" charset="-120"/>
+              </a:rPr>
+              <a:t>-1.3%</a:t>
             </a:r>
             <a:endParaRPr lang="en-US" sz="1300" dirty="0"/>
           </a:p>
@@ -12557,39 +12758,14 @@
       </p:sp>
       <p:sp>
         <p:nvSpPr>
-          <p:cNvPr id="22" name="Shape 20"/>
-          <p:cNvSpPr/>
-          <p:nvPr/>
-        </p:nvSpPr>
-        <p:spPr>
-          <a:xfrm>
-            <a:off x="7818120" y="4663440"/>
-            <a:ext cx="548640" cy="82296"/>
-          </a:xfrm>
-          <a:prstGeom prst="rect">
-            <a:avLst/>
-          </a:prstGeom>
-          <a:solidFill>
-            <a:srgbClr val="FF6B7A"/>
-          </a:solidFill>
-          <a:ln w="12700">
-            <a:solidFill>
-              <a:srgbClr val="FF6B7A"/>
-            </a:solidFill>
-            <a:prstDash val="solid"/>
-          </a:ln>
-        </p:spPr>
-      </p:sp>
-      <p:sp>
-        <p:nvSpPr>
-          <p:cNvPr id="23" name="Text 21"/>
-          <p:cNvSpPr txBox="1"/>
-          <p:nvPr/>
-        </p:nvSpPr>
-        <p:spPr>
-          <a:xfrm>
-            <a:off x="7635240" y="4736592"/>
-            <a:ext cx="914400" cy="274320"/>
+          <p:cNvPr id="27" name="Text 25"/>
+          <p:cNvSpPr txBox="1"/>
+          <p:nvPr/>
+        </p:nvSpPr>
+        <p:spPr>
+          <a:xfrm>
+            <a:off x="9052560" y="5074920"/>
+            <a:ext cx="1188720" cy="457200"/>
           </a:xfrm>
           <a:prstGeom prst="rect">
             <a:avLst/>
@@ -12605,15 +12781,96 @@
               <a:buNone/>
             </a:pPr>
             <a:r>
+              <a:rPr lang="en-US" sz="1200" dirty="0">
+                <a:solidFill>
+                  <a:srgbClr val="C9C4EE"/>
+                </a:solidFill>
+                <a:latin typeface="Arial" pitchFamily="34" charset="0"/>
+                <a:ea typeface="Arial" pitchFamily="34" charset="-122"/>
+                <a:cs typeface="Arial" pitchFamily="34" charset="-120"/>
+              </a:rPr>
+              <a:t>50–70¢</a:t>
+            </a:r>
+            <a:endParaRPr lang="en-US" sz="1200" dirty="0"/>
+          </a:p>
+          <a:p>
+            <a:pPr algn="ctr" indent="0" marL="0">
+              <a:buNone/>
+            </a:pPr>
+            <a:r>
+              <a:rPr lang="en-US" sz="1200" dirty="0">
+                <a:solidFill>
+                  <a:srgbClr val="C9C4EE"/>
+                </a:solidFill>
+                <a:latin typeface="Arial" pitchFamily="34" charset="0"/>
+                <a:ea typeface="Arial" pitchFamily="34" charset="-122"/>
+                <a:cs typeface="Arial" pitchFamily="34" charset="-120"/>
+              </a:rPr>
+              <a:t>203 signals</a:t>
+            </a:r>
+            <a:endParaRPr lang="en-US" sz="1200" dirty="0"/>
+          </a:p>
+        </p:txBody>
+      </p:sp>
+      <p:sp>
+        <p:nvSpPr>
+          <p:cNvPr id="28" name="Shape 26"/>
+          <p:cNvSpPr/>
+          <p:nvPr/>
+        </p:nvSpPr>
+        <p:spPr>
+          <a:xfrm>
+            <a:off x="10469880" y="3401568"/>
+            <a:ext cx="640080" cy="301752"/>
+          </a:xfrm>
+          <a:prstGeom prst="rect">
+            <a:avLst/>
+          </a:prstGeom>
+          <a:solidFill>
+            <a:srgbClr val="7653F6"/>
+          </a:solidFill>
+          <a:ln w="12700">
+            <a:solidFill>
+              <a:srgbClr val="7653F6"/>
+            </a:solidFill>
+            <a:prstDash val="solid"/>
+          </a:ln>
+        </p:spPr>
+      </p:sp>
+      <p:sp>
+        <p:nvSpPr>
+          <p:cNvPr id="29" name="Text 27"/>
+          <p:cNvSpPr txBox="1"/>
+          <p:nvPr/>
+        </p:nvSpPr>
+        <p:spPr>
+          <a:xfrm>
+            <a:off x="10241280" y="3081528"/>
+            <a:ext cx="1097280" cy="274320"/>
+          </a:xfrm>
+          <a:prstGeom prst="rect">
+            <a:avLst/>
+          </a:prstGeom>
+          <a:noFill/>
+          <a:ln/>
+        </p:spPr>
+        <p:txBody>
+          <a:bodyPr wrap="square" lIns="0" tIns="0" rIns="0" bIns="0" rtlCol="0" anchor="ctr"/>
+          <a:lstStyle/>
+          <a:p>
+            <a:pPr algn="ctr" indent="0" marL="0">
+              <a:buNone/>
+            </a:pPr>
+            <a:r>
               <a:rPr lang="en-US" sz="1300" b="1" dirty="0">
                 <a:solidFill>
-                  <a:srgbClr val="FF6B7A"/>
-                </a:solidFill>
-                <a:latin typeface="Arial" pitchFamily="34" charset="0"/>
-                <a:ea typeface="Arial" pitchFamily="34" charset="-122"/>
-                <a:cs typeface="Arial" pitchFamily="34" charset="-120"/>
-              </a:rPr>
-              <a:t>-0.3%</a:t>
+                  <a:srgbClr val="FFFFFF"/>
+                </a:solidFill>
+                <a:latin typeface="Arial" pitchFamily="34" charset="0"/>
+                <a:ea typeface="Arial" pitchFamily="34" charset="-122"/>
+                <a:cs typeface="Arial" pitchFamily="34" charset="-120"/>
+              </a:rPr>
+              <a:t>+3.3%</a:t>
             </a:r>
             <a:endParaRPr lang="en-US" sz="1300" dirty="0"/>
           </a:p>
@@ -12621,14 +12878,14 @@
       </p:sp>
       <p:sp>
         <p:nvSpPr>
-          <p:cNvPr id="24" name="Text 22"/>
-          <p:cNvSpPr txBox="1"/>
-          <p:nvPr/>
-        </p:nvSpPr>
-        <p:spPr>
-          <a:xfrm>
-            <a:off x="7635240" y="5120640"/>
-            <a:ext cx="914400" cy="274320"/>
+          <p:cNvPr id="30" name="Text 28"/>
+          <p:cNvSpPr txBox="1"/>
+          <p:nvPr/>
+        </p:nvSpPr>
+        <p:spPr>
+          <a:xfrm>
+            <a:off x="10195560" y="5074920"/>
+            <a:ext cx="1188720" cy="457200"/>
           </a:xfrm>
           <a:prstGeom prst="rect">
             <a:avLst/>
@@ -12644,7 +12901,7 @@
               <a:buNone/>
             </a:pPr>
             <a:r>
-              <a:rPr lang="en-US" sz="1300" dirty="0">
+              <a:rPr lang="en-US" sz="1200" dirty="0">
                 <a:solidFill>
                   <a:srgbClr val="C9C4EE"/>
                 </a:solidFill>
@@ -12652,102 +12909,16 @@
                 <a:ea typeface="Arial" pitchFamily="34" charset="-122"/>
                 <a:cs typeface="Arial" pitchFamily="34" charset="-120"/>
               </a:rPr>
-              <a:t>2–6h</a:t>
-            </a:r>
-            <a:endParaRPr lang="en-US" sz="1300" dirty="0"/>
-          </a:p>
-        </p:txBody>
-      </p:sp>
-      <p:sp>
-        <p:nvSpPr>
-          <p:cNvPr id="25" name="Shape 23"/>
-          <p:cNvSpPr/>
-          <p:nvPr/>
-        </p:nvSpPr>
-        <p:spPr>
-          <a:xfrm>
-            <a:off x="8732520" y="4334256"/>
-            <a:ext cx="548640" cy="329184"/>
-          </a:xfrm>
-          <a:prstGeom prst="rect">
-            <a:avLst/>
-          </a:prstGeom>
-          <a:solidFill>
-            <a:srgbClr val="7653F6"/>
-          </a:solidFill>
-          <a:ln w="12700">
-            <a:solidFill>
-              <a:srgbClr val="7653F6"/>
-            </a:solidFill>
-            <a:prstDash val="solid"/>
-          </a:ln>
-        </p:spPr>
-      </p:sp>
-      <p:sp>
-        <p:nvSpPr>
-          <p:cNvPr id="26" name="Text 24"/>
-          <p:cNvSpPr txBox="1"/>
-          <p:nvPr/>
-        </p:nvSpPr>
-        <p:spPr>
-          <a:xfrm>
-            <a:off x="8549640" y="4014216"/>
-            <a:ext cx="914400" cy="274320"/>
-          </a:xfrm>
-          <a:prstGeom prst="rect">
-            <a:avLst/>
-          </a:prstGeom>
-          <a:noFill/>
-          <a:ln/>
-        </p:spPr>
-        <p:txBody>
-          <a:bodyPr wrap="square" lIns="0" tIns="0" rIns="0" bIns="0" rtlCol="0" anchor="ctr"/>
-          <a:lstStyle/>
+              <a:t>70–85¢</a:t>
+            </a:r>
+            <a:endParaRPr lang="en-US" sz="1200" dirty="0"/>
+          </a:p>
           <a:p>
             <a:pPr algn="ctr" indent="0" marL="0">
               <a:buNone/>
             </a:pPr>
             <a:r>
-              <a:rPr lang="en-US" sz="1300" b="1" dirty="0">
-                <a:solidFill>
-                  <a:srgbClr val="FFFFFF"/>
-                </a:solidFill>
-                <a:latin typeface="Arial" pitchFamily="34" charset="0"/>
-                <a:ea typeface="Arial" pitchFamily="34" charset="-122"/>
-                <a:cs typeface="Arial" pitchFamily="34" charset="-120"/>
-              </a:rPr>
-              <a:t>+1.2%</a:t>
-            </a:r>
-            <a:endParaRPr lang="en-US" sz="1300" dirty="0"/>
-          </a:p>
-        </p:txBody>
-      </p:sp>
-      <p:sp>
-        <p:nvSpPr>
-          <p:cNvPr id="27" name="Text 25"/>
-          <p:cNvSpPr txBox="1"/>
-          <p:nvPr/>
-        </p:nvSpPr>
-        <p:spPr>
-          <a:xfrm>
-            <a:off x="8549640" y="5120640"/>
-            <a:ext cx="914400" cy="274320"/>
-          </a:xfrm>
-          <a:prstGeom prst="rect">
-            <a:avLst/>
-          </a:prstGeom>
-          <a:noFill/>
-          <a:ln/>
-        </p:spPr>
-        <p:txBody>
-          <a:bodyPr wrap="square" lIns="0" tIns="0" rIns="0" bIns="0" rtlCol="0" anchor="ctr"/>
-          <a:lstStyle/>
-          <a:p>
-            <a:pPr algn="ctr" indent="0" marL="0">
-              <a:buNone/>
-            </a:pPr>
-            <a:r>
-              <a:rPr lang="en-US" sz="1300" dirty="0">
+              <a:rPr lang="en-US" sz="1200" dirty="0">
                 <a:solidFill>
                   <a:srgbClr val="C9C4EE"/>
                 </a:solidFill>
@@ -12755,221 +12926,15 @@
                 <a:ea typeface="Arial" pitchFamily="34" charset="-122"/>
                 <a:cs typeface="Arial" pitchFamily="34" charset="-120"/>
               </a:rPr>
-              <a:t>6–24h</a:t>
-            </a:r>
-            <a:endParaRPr lang="en-US" sz="1300" dirty="0"/>
-          </a:p>
-        </p:txBody>
-      </p:sp>
-      <p:sp>
-        <p:nvSpPr>
-          <p:cNvPr id="28" name="Shape 26"/>
-          <p:cNvSpPr/>
-          <p:nvPr/>
-        </p:nvSpPr>
-        <p:spPr>
-          <a:xfrm>
-            <a:off x="9646920" y="4087368"/>
-            <a:ext cx="548640" cy="576072"/>
-          </a:xfrm>
-          <a:prstGeom prst="rect">
-            <a:avLst/>
-          </a:prstGeom>
-          <a:solidFill>
-            <a:srgbClr val="7653F6"/>
-          </a:solidFill>
-          <a:ln w="12700">
-            <a:solidFill>
-              <a:srgbClr val="7653F6"/>
-            </a:solidFill>
-            <a:prstDash val="solid"/>
-          </a:ln>
-        </p:spPr>
-      </p:sp>
-      <p:sp>
-        <p:nvSpPr>
-          <p:cNvPr id="29" name="Text 27"/>
-          <p:cNvSpPr txBox="1"/>
-          <p:nvPr/>
-        </p:nvSpPr>
-        <p:spPr>
-          <a:xfrm>
-            <a:off x="9464040" y="3767328"/>
-            <a:ext cx="914400" cy="274320"/>
-          </a:xfrm>
-          <a:prstGeom prst="rect">
-            <a:avLst/>
-          </a:prstGeom>
-          <a:noFill/>
-          <a:ln/>
-        </p:spPr>
-        <p:txBody>
-          <a:bodyPr wrap="square" lIns="0" tIns="0" rIns="0" bIns="0" rtlCol="0" anchor="ctr"/>
-          <a:lstStyle/>
-          <a:p>
-            <a:pPr algn="ctr" indent="0" marL="0">
-              <a:buNone/>
-            </a:pPr>
-            <a:r>
-              <a:rPr lang="en-US" sz="1300" b="1" dirty="0">
-                <a:solidFill>
-                  <a:srgbClr val="FFFFFF"/>
-                </a:solidFill>
-                <a:latin typeface="Arial" pitchFamily="34" charset="0"/>
-                <a:ea typeface="Arial" pitchFamily="34" charset="-122"/>
-                <a:cs typeface="Arial" pitchFamily="34" charset="-120"/>
-              </a:rPr>
-              <a:t>+2.1%</a:t>
-            </a:r>
-            <a:endParaRPr lang="en-US" sz="1300" dirty="0"/>
-          </a:p>
-        </p:txBody>
-      </p:sp>
-      <p:sp>
-        <p:nvSpPr>
-          <p:cNvPr id="30" name="Text 28"/>
-          <p:cNvSpPr txBox="1"/>
-          <p:nvPr/>
-        </p:nvSpPr>
-        <p:spPr>
-          <a:xfrm>
-            <a:off x="9464040" y="5120640"/>
-            <a:ext cx="914400" cy="274320"/>
-          </a:xfrm>
-          <a:prstGeom prst="rect">
-            <a:avLst/>
-          </a:prstGeom>
-          <a:noFill/>
-          <a:ln/>
-        </p:spPr>
-        <p:txBody>
-          <a:bodyPr wrap="square" lIns="0" tIns="0" rIns="0" bIns="0" rtlCol="0" anchor="ctr"/>
-          <a:lstStyle/>
-          <a:p>
-            <a:pPr algn="ctr" indent="0" marL="0">
-              <a:buNone/>
-            </a:pPr>
-            <a:r>
-              <a:rPr lang="en-US" sz="1300" dirty="0">
-                <a:solidFill>
-                  <a:srgbClr val="C9C4EE"/>
-                </a:solidFill>
-                <a:latin typeface="Arial" pitchFamily="34" charset="0"/>
-                <a:ea typeface="Arial" pitchFamily="34" charset="-122"/>
-                <a:cs typeface="Arial" pitchFamily="34" charset="-120"/>
-              </a:rPr>
-              <a:t>1–7d</a:t>
-            </a:r>
-            <a:endParaRPr lang="en-US" sz="1300" dirty="0"/>
-          </a:p>
-        </p:txBody>
-      </p:sp>
-      <p:sp>
-        <p:nvSpPr>
-          <p:cNvPr id="31" name="Shape 29"/>
-          <p:cNvSpPr/>
-          <p:nvPr/>
-        </p:nvSpPr>
-        <p:spPr>
-          <a:xfrm>
-            <a:off x="10561320" y="3813048"/>
-            <a:ext cx="548640" cy="850392"/>
-          </a:xfrm>
-          <a:prstGeom prst="rect">
-            <a:avLst/>
-          </a:prstGeom>
-          <a:solidFill>
-            <a:srgbClr val="7653F6"/>
-          </a:solidFill>
-          <a:ln w="12700">
-            <a:solidFill>
-              <a:srgbClr val="7653F6"/>
-            </a:solidFill>
-            <a:prstDash val="solid"/>
-          </a:ln>
-        </p:spPr>
-      </p:sp>
-      <p:sp>
-        <p:nvSpPr>
-          <p:cNvPr id="32" name="Text 30"/>
-          <p:cNvSpPr txBox="1"/>
-          <p:nvPr/>
-        </p:nvSpPr>
-        <p:spPr>
-          <a:xfrm>
-            <a:off x="10378440" y="3493008"/>
-            <a:ext cx="914400" cy="274320"/>
-          </a:xfrm>
-          <a:prstGeom prst="rect">
-            <a:avLst/>
-          </a:prstGeom>
-          <a:noFill/>
-          <a:ln/>
-        </p:spPr>
-        <p:txBody>
-          <a:bodyPr wrap="square" lIns="0" tIns="0" rIns="0" bIns="0" rtlCol="0" anchor="ctr"/>
-          <a:lstStyle/>
-          <a:p>
-            <a:pPr algn="ctr" indent="0" marL="0">
-              <a:buNone/>
-            </a:pPr>
-            <a:r>
-              <a:rPr lang="en-US" sz="1300" b="1" dirty="0">
-                <a:solidFill>
-                  <a:srgbClr val="FFFFFF"/>
-                </a:solidFill>
-                <a:latin typeface="Arial" pitchFamily="34" charset="0"/>
-                <a:ea typeface="Arial" pitchFamily="34" charset="-122"/>
-                <a:cs typeface="Arial" pitchFamily="34" charset="-120"/>
-              </a:rPr>
-              <a:t>+3.1%</a:t>
-            </a:r>
-            <a:endParaRPr lang="en-US" sz="1300" dirty="0"/>
-          </a:p>
-        </p:txBody>
-      </p:sp>
-      <p:sp>
-        <p:nvSpPr>
-          <p:cNvPr id="33" name="Text 31"/>
-          <p:cNvSpPr txBox="1"/>
-          <p:nvPr/>
-        </p:nvSpPr>
-        <p:spPr>
-          <a:xfrm>
-            <a:off x="10378440" y="5120640"/>
-            <a:ext cx="914400" cy="274320"/>
-          </a:xfrm>
-          <a:prstGeom prst="rect">
-            <a:avLst/>
-          </a:prstGeom>
-          <a:noFill/>
-          <a:ln/>
-        </p:spPr>
-        <p:txBody>
-          <a:bodyPr wrap="square" lIns="0" tIns="0" rIns="0" bIns="0" rtlCol="0" anchor="ctr"/>
-          <a:lstStyle/>
-          <a:p>
-            <a:pPr algn="ctr" indent="0" marL="0">
-              <a:buNone/>
-            </a:pPr>
-            <a:r>
-              <a:rPr lang="en-US" sz="1300" dirty="0">
-                <a:solidFill>
-                  <a:srgbClr val="C9C4EE"/>
-                </a:solidFill>
-                <a:latin typeface="Arial" pitchFamily="34" charset="0"/>
-                <a:ea typeface="Arial" pitchFamily="34" charset="-122"/>
-                <a:cs typeface="Arial" pitchFamily="34" charset="-120"/>
-              </a:rPr>
-              <a:t>&gt;7d</a:t>
-            </a:r>
-            <a:endParaRPr lang="en-US" sz="1300" dirty="0"/>
-          </a:p>
-        </p:txBody>
-      </p:sp>
-      <p:sp>
-        <p:nvSpPr>
-          <p:cNvPr id="34" name="Text 32"/>
+              <a:t>304 signals</a:t>
+            </a:r>
+            <a:endParaRPr lang="en-US" sz="1200" dirty="0"/>
+          </a:p>
+        </p:txBody>
+      </p:sp>
+      <p:sp>
+        <p:nvSpPr>
+          <p:cNvPr id="31" name="Text 29"/>
           <p:cNvSpPr txBox="1"/>
           <p:nvPr/>
         </p:nvSpPr>
@@ -13000,7 +12965,7 @@
                 <a:ea typeface="Arial" pitchFamily="34" charset="-122"/>
                 <a:cs typeface="Arial" pitchFamily="34" charset="-120"/>
               </a:rPr>
-              <a:t>Honest limits: wallet ranks are today's (look-ahead bias) · 93% sports, most settling within hours · the score and smart-money check can't be replayed · signals taking a day or more: +2.4% ± 2.9%. The live track record is the real test.</a:t>
+              <a:t>What it can't test: the Datadash score and the smart-money check only exist for today's holdings, and wallet ranks are today's. So every live signal is scored as its market settles: the track record is the real test.</a:t>
             </a:r>
             <a:endParaRPr lang="en-US" sz="1400" dirty="0"/>
           </a:p>
